--- a/docs/pptx/auc3/ritu-auc3-cox-linear-ratio-death.pptx
+++ b/docs/pptx/auc3/ritu-auc3-cox-linear-ratio-death.pptx
@@ -2443,7 +2443,7 @@
           </p:nvSpPr>
           <p:spPr>
             <a:xfrm>
-              <a:off x="1463479" y="2073503"/>
+              <a:off x="1464298" y="2073503"/>
               <a:ext cx="0" cy="3649639"/>
             </a:xfrm>
             <a:custGeom>
@@ -2486,7 +2486,7 @@
           </p:nvSpPr>
           <p:spPr>
             <a:xfrm>
-              <a:off x="3267849" y="2073503"/>
+              <a:off x="3268188" y="2073503"/>
               <a:ext cx="0" cy="3649639"/>
             </a:xfrm>
             <a:custGeom>
@@ -2529,7 +2529,7 @@
           </p:nvSpPr>
           <p:spPr>
             <a:xfrm>
-              <a:off x="5072218" y="2073503"/>
+              <a:off x="5072078" y="2073503"/>
               <a:ext cx="0" cy="3649639"/>
             </a:xfrm>
             <a:custGeom>
@@ -2572,7 +2572,7 @@
           </p:nvSpPr>
           <p:spPr>
             <a:xfrm>
-              <a:off x="6876587" y="2073503"/>
+              <a:off x="6875967" y="2073503"/>
               <a:ext cx="0" cy="3649639"/>
             </a:xfrm>
             <a:custGeom>
@@ -2830,7 +2830,7 @@
           </p:nvSpPr>
           <p:spPr>
             <a:xfrm>
-              <a:off x="2365664" y="2073503"/>
+              <a:off x="2366243" y="2073503"/>
               <a:ext cx="0" cy="3649639"/>
             </a:xfrm>
             <a:custGeom>
@@ -2873,7 +2873,7 @@
           </p:nvSpPr>
           <p:spPr>
             <a:xfrm>
-              <a:off x="4170033" y="2073503"/>
+              <a:off x="4170133" y="2073503"/>
               <a:ext cx="0" cy="3649639"/>
             </a:xfrm>
             <a:custGeom>
@@ -2916,7 +2916,7 @@
           </p:nvSpPr>
           <p:spPr>
             <a:xfrm>
-              <a:off x="5974402" y="2073503"/>
+              <a:off x="5974022" y="2073503"/>
               <a:ext cx="0" cy="3649639"/>
             </a:xfrm>
             <a:custGeom>
@@ -2959,7 +2959,7 @@
           </p:nvSpPr>
           <p:spPr>
             <a:xfrm>
-              <a:off x="7778772" y="2073503"/>
+              <a:off x="7777912" y="2073503"/>
               <a:ext cx="0" cy="3649639"/>
             </a:xfrm>
             <a:custGeom>
@@ -3045,7 +3045,7 @@
           </p:nvSpPr>
           <p:spPr>
             <a:xfrm>
-              <a:off x="4164901" y="2073503"/>
+              <a:off x="4170171" y="2073503"/>
               <a:ext cx="0" cy="3649639"/>
             </a:xfrm>
             <a:custGeom>
@@ -3318,7 +3318,7 @@
           </p:nvSpPr>
           <p:spPr>
             <a:xfrm>
-              <a:off x="2284877" y="5785772"/>
+              <a:off x="2285456" y="5785772"/>
               <a:ext cx="161574" cy="80101"/>
             </a:xfrm>
             <a:prstGeom prst="rect">
@@ -3364,7 +3364,7 @@
           </p:nvSpPr>
           <p:spPr>
             <a:xfrm>
-              <a:off x="4138944" y="5785772"/>
+              <a:off x="4139043" y="5785772"/>
               <a:ext cx="62179" cy="80101"/>
             </a:xfrm>
             <a:prstGeom prst="rect">
@@ -3410,7 +3410,7 @@
           </p:nvSpPr>
           <p:spPr>
             <a:xfrm>
-              <a:off x="5912223" y="5785772"/>
+              <a:off x="5911843" y="5785772"/>
               <a:ext cx="124358" cy="80101"/>
             </a:xfrm>
             <a:prstGeom prst="rect">
@@ -3456,7 +3456,7 @@
           </p:nvSpPr>
           <p:spPr>
             <a:xfrm>
-              <a:off x="7716592" y="5785772"/>
+              <a:off x="7715733" y="5785772"/>
               <a:ext cx="124358" cy="80101"/>
             </a:xfrm>
             <a:prstGeom prst="rect">
@@ -3627,7 +3627,7 @@
                   <a:latin typeface="Helvetica"/>
                   <a:cs typeface="Helvetica"/>
                 </a:rPr>
-                <a:t>HR per 10 % decline: NA (NA-NA), p_Bonf = NA (n = 6)  |  per IQR decline (Δ = 27.4 %): NA (NA-NA)  |  IQR: [-12.6, 14.8] %</a:t>
+                <a:t>HR per 10 % decline: NA (NA-NA), p_Bonf = NA (n = 6)  |  per IQR decline (Δ = 27.2 %): NA (NA-NA)  |  IQR: [-12.3, 14.9] %</a:t>
               </a:r>
             </a:p>
           </p:txBody>
